--- a/examples/e-flugzeuge/update/deck.pptx
+++ b/examples/e-flugzeuge/update/deck.pptx
@@ -139,7 +139,7 @@
             <a:solidFill>
               <a:srgbClr val="7A808A"/>
             </a:solidFill>
-            <a:ln w="38100" cap="flat">
+            <a:ln w="50800" cap="flat">
               <a:solidFill>
                 <a:srgbClr val="7A808A"/>
               </a:solidFill>
@@ -259,7 +259,7 @@
             <a:solidFill>
               <a:srgbClr val="1F4E79"/>
             </a:solidFill>
-            <a:ln w="38100" cap="flat">
+            <a:ln w="50800" cap="flat">
               <a:solidFill>
                 <a:srgbClr val="1F4E79"/>
               </a:solidFill>
@@ -584,7 +584,7 @@
             <a:solidFill>
               <a:srgbClr val="7A808A"/>
             </a:solidFill>
-            <a:ln w="38100" cap="flat">
+            <a:ln w="50800" cap="flat">
               <a:solidFill>
                 <a:srgbClr val="7A808A"/>
               </a:solidFill>
@@ -704,7 +704,7 @@
             <a:solidFill>
               <a:srgbClr val="1F4E79"/>
             </a:solidFill>
-            <a:ln w="38100" cap="flat">
+            <a:ln w="50800" cap="flat">
               <a:solidFill>
                 <a:srgbClr val="1F4E79"/>
               </a:solidFill>
@@ -1029,7 +1029,7 @@
             <a:solidFill>
               <a:srgbClr val="7A808A"/>
             </a:solidFill>
-            <a:ln w="38100" cap="flat">
+            <a:ln w="50800" cap="flat">
               <a:solidFill>
                 <a:srgbClr val="7A808A"/>
               </a:solidFill>
@@ -1149,7 +1149,7 @@
             <a:solidFill>
               <a:srgbClr val="1F4E79"/>
             </a:solidFill>
-            <a:ln w="38100" cap="flat">
+            <a:ln w="50800" cap="flat">
               <a:solidFill>
                 <a:srgbClr val="1F4E79"/>
               </a:solidFill>
@@ -2300,7 +2300,7 @@
         <p:spPr>
           <a:xfrm>
             <a:off x="609600" y="2032000"/>
-            <a:ext cx="9753600" cy="711200"/>
+            <a:ext cx="6096000" cy="1422400"/>
           </a:xfrm>
           <a:prstGeom prst="rect">
             <a:avLst/>
@@ -2328,54 +2328,6 @@
               <a:buNone/>
             </a:pPr>
             <a:endParaRPr lang="en-US" sz="4000" dirty="0"/>
-          </a:p>
-        </p:txBody>
-      </p:sp>
-      <p:sp>
-        <p:nvSpPr>
-          <p:cNvPr id="25" name="Slide Number Placeholder 0"/>
-          <p:cNvSpPr>
-            <a:spLocks noGrp="1"/>
-          </p:cNvSpPr>
-          <p:nvPr>
-            <p:ph type="sldNum" sz="quarter" idx="4294967295"/>
-          </p:nvPr>
-        </p:nvSpPr>
-        <p:spPr>
-          <a:xfrm>
-            <a:off x="10972800" y="5791200"/>
-            <a:ext cx="609600" cy="304800"/>
-          </a:xfrm>
-          <a:prstGeom prst="rect">
-            <a:avLst/>
-          </a:prstGeom>
-          <a:extLst>
-            <a:ext uri="{C572A759-6A51-4108-AA02-DFA0A04FC94B}">
-              <ma14:wrappingTextBoxFlag xmlns:ma14="http://schemas.microsoft.com/office/mac/drawingml/2011/main" val="0"/>
-            </a:ext>
-          </a:extLst>
-        </p:spPr>
-        <p:txBody>
-          <a:bodyPr/>
-          <a:lstStyle>
-            <a:lvl1pPr>
-              <a:defRPr sz="1000">
-                <a:solidFill>
-                  <a:srgbClr val="4A5866"/>
-                </a:solidFill>
-                <a:latin typeface="Calibri"/>
-                <a:ea typeface="Calibri"/>
-                <a:cs typeface="Calibri"/>
-              </a:defRPr>
-            </a:lvl1pPr>
-          </a:lstStyle>
-          <a:p>
-            <a:pPr algn="r"/>
-            <a:fld id="{F7021451-1387-4CA6-816F-3879F97B5CBC}" type="slidenum">
-              <a:rPr b="0" lang="en-US"/>
-              <a:t>1002</a:t>
-            </a:fld>
-            <a:endParaRPr lang="en-US"/>
           </a:p>
         </p:txBody>
       </p:sp>
@@ -2976,9 +2928,53 @@
           <a:chExt cx="0" cy="0"/>
         </a:xfrm>
       </p:grpSpPr>
+      <p:pic>
+        <p:nvPicPr>
+          <p:cNvPr id="2" name="Image 0" descr="Illustration: Elektroflugzeug in Stahlblau in der Draufsicht über hellgrauen Ringen">    </p:cNvPr>
+          <p:cNvPicPr>
+            <a:picLocks noChangeAspect="1"/>
+          </p:cNvPicPr>
+          <p:nvPr/>
+        </p:nvPicPr>
+        <p:blipFill>
+          <a:blip r:embed="rId1"/>
+          <a:stretch>
+            <a:fillRect/>
+          </a:stretch>
+        </p:blipFill>
+        <p:spPr>
+          <a:xfrm>
+            <a:off x="0" y="0"/>
+            <a:ext cx="12192000" cy="6858000"/>
+          </a:xfrm>
+          <a:prstGeom prst="rect">
+            <a:avLst/>
+          </a:prstGeom>
+        </p:spPr>
+      </p:pic>
       <p:sp>
         <p:nvSpPr>
-          <p:cNvPr id="2" name="Text 0"/>
+          <p:cNvPr id="3" name="Shape 0"/>
+          <p:cNvSpPr/>
+          <p:nvPr/>
+        </p:nvSpPr>
+        <p:spPr>
+          <a:xfrm>
+            <a:off x="609600" y="2032000"/>
+            <a:ext cx="6096000" cy="1422400"/>
+          </a:xfrm>
+          <a:prstGeom prst="rect">
+            <a:avLst/>
+          </a:prstGeom>
+          <a:solidFill>
+            <a:srgbClr val="FFFFFF"/>
+          </a:solidFill>
+          <a:ln/>
+        </p:spPr>
+      </p:sp>
+      <p:sp>
+        <p:nvSpPr>
+          <p:cNvPr id="4" name="Text 0"/>
           <p:cNvSpPr/>
           <p:nvPr>
             <p:ph idx="100" type="title" hasCustomPrompt="1"/>
@@ -2987,7 +2983,7 @@
         <p:spPr>
           <a:xfrm>
             <a:off x="609600" y="2032000"/>
-            <a:ext cx="9753600" cy="711200"/>
+            <a:ext cx="6096000" cy="1422400"/>
           </a:xfrm>
           <a:prstGeom prst="rect">
             <a:avLst/>
@@ -3011,7 +3007,24 @@
                 <a:ea typeface="Calibri" pitchFamily="34" charset="-122"/>
                 <a:cs typeface="Calibri" pitchFamily="34" charset="-120"/>
               </a:rPr>
-              <a:t>Status Pilotprojekt E-Regionalflug, KW 39</a:t>
+              <a:t>Status Pilotprojekt</a:t>
+            </a:r>
+            <a:endParaRPr lang="en-US" sz="4000" dirty="0"/>
+          </a:p>
+          <a:p>
+            <a:pPr algn="l" indent="0" marL="0">
+              <a:buNone/>
+            </a:pPr>
+            <a:r>
+              <a:rPr lang="en-US" sz="4000" b="1" dirty="0">
+                <a:solidFill>
+                  <a:srgbClr val="1B2733"/>
+                </a:solidFill>
+                <a:latin typeface="Calibri" pitchFamily="34" charset="0"/>
+                <a:ea typeface="Calibri" pitchFamily="34" charset="-122"/>
+                <a:cs typeface="Calibri" pitchFamily="34" charset="-120"/>
+              </a:rPr>
+              <a:t>E-Regionalflug, KW 39</a:t>
             </a:r>
             <a:endParaRPr lang="en-US" sz="4000" dirty="0"/>
           </a:p>
@@ -3019,19 +3032,21 @@
       </p:sp>
       <p:sp>
         <p:nvSpPr>
-          <p:cNvPr id="3" name="Text 1"/>
+          <p:cNvPr id="5" name="Text 2"/>
           <p:cNvSpPr txBox="1"/>
           <p:nvPr/>
         </p:nvSpPr>
         <p:spPr>
           <a:xfrm>
-            <a:off x="609600" y="2946400"/>
-            <a:ext cx="6096000" cy="406400"/>
+            <a:off x="609600" y="3657600"/>
+            <a:ext cx="6096000" cy="304800"/>
           </a:xfrm>
           <a:prstGeom prst="rect">
             <a:avLst/>
           </a:prstGeom>
-          <a:noFill/>
+          <a:solidFill>
+            <a:srgbClr val="FFFFFF"/>
+          </a:solidFill>
           <a:ln/>
         </p:spPr>
         <p:txBody>
@@ -3053,54 +3068,6 @@
               <a:t>Beispieldaten</a:t>
             </a:r>
             <a:endParaRPr lang="en-US" sz="1800" dirty="0"/>
-          </a:p>
-        </p:txBody>
-      </p:sp>
-      <p:sp>
-        <p:nvSpPr>
-          <p:cNvPr id="25" name="Slide Number Placeholder 0"/>
-          <p:cNvSpPr>
-            <a:spLocks noGrp="1"/>
-          </p:cNvSpPr>
-          <p:nvPr>
-            <p:ph type="sldNum" sz="quarter" idx="4294967295"/>
-          </p:nvPr>
-        </p:nvSpPr>
-        <p:spPr>
-          <a:xfrm>
-            <a:off x="10972800" y="5791200"/>
-            <a:ext cx="609600" cy="304800"/>
-          </a:xfrm>
-          <a:prstGeom prst="rect">
-            <a:avLst/>
-          </a:prstGeom>
-          <a:extLst>
-            <a:ext uri="{C572A759-6A51-4108-AA02-DFA0A04FC94B}">
-              <ma14:wrappingTextBoxFlag xmlns:ma14="http://schemas.microsoft.com/office/mac/drawingml/2011/main" val="0"/>
-            </a:ext>
-          </a:extLst>
-        </p:spPr>
-        <p:txBody>
-          <a:bodyPr/>
-          <a:lstStyle>
-            <a:lvl1pPr>
-              <a:defRPr sz="1000">
-                <a:solidFill>
-                  <a:srgbClr val="4A5866"/>
-                </a:solidFill>
-                <a:latin typeface="Calibri"/>
-                <a:ea typeface="Calibri"/>
-                <a:cs typeface="Calibri"/>
-              </a:defRPr>
-            </a:lvl1pPr>
-          </a:lstStyle>
-          <a:p>
-            <a:pPr algn="r"/>
-            <a:fld id="{F7021451-1387-4CA6-816F-3879F97B5CBC}" type="slidenum">
-              <a:rPr b="0" lang="en-US"/>
-              <a:t>1</a:t>
-            </a:fld>
-            <a:endParaRPr lang="en-US"/>
           </a:p>
         </p:txBody>
       </p:sp>
@@ -3273,7 +3240,7 @@
                       </a:endParaRPr>
                     </a:p>
                   </a:txBody>
-                  <a:tcPr marL="0" marR="100584" marT="0" marB="0" anchor="ctr">
+                  <a:tcPr marL="100584" marR="100584" marT="0" marB="0" anchor="ctr">
                     <a:lnL w="0" cap="flat" cmpd="sng" algn="ctr">
                       <a:noFill/>
                     </a:lnL>
@@ -3320,7 +3287,7 @@
                       </a:endParaRPr>
                     </a:p>
                   </a:txBody>
-                  <a:tcPr marL="0" marR="100584" marT="0" marB="0" anchor="ctr">
+                  <a:tcPr marL="100584" marR="100584" marT="0" marB="0" anchor="ctr">
                     <a:lnL w="0" cap="flat" cmpd="sng" algn="ctr">
                       <a:noFill/>
                     </a:lnL>
@@ -3367,7 +3334,7 @@
                       </a:endParaRPr>
                     </a:p>
                   </a:txBody>
-                  <a:tcPr marL="0" marR="100584" marT="0" marB="0" anchor="ctr">
+                  <a:tcPr marL="100584" marR="100584" marT="0" marB="0" anchor="ctr">
                     <a:lnL w="0" cap="flat" cmpd="sng" algn="ctr">
                       <a:noFill/>
                     </a:lnL>
@@ -3414,7 +3381,7 @@
                       </a:endParaRPr>
                     </a:p>
                   </a:txBody>
-                  <a:tcPr marL="0" marR="100584" marT="0" marB="0" anchor="ctr">
+                  <a:tcPr marL="100584" marR="100584" marT="0" marB="0" anchor="ctr">
                     <a:lnL w="0" cap="flat" cmpd="sng" algn="ctr">
                       <a:noFill/>
                     </a:lnL>
@@ -3489,13 +3456,13 @@
                     <a:bodyPr/>
                     <a:lstStyle/>
                     <a:p>
-                      <a:pPr algn="l" indent="0" marL="0">
+                      <a:pPr algn="ctr" indent="0" marL="0">
                         <a:buNone/>
                       </a:pPr>
                       <a:r>
                         <a:rPr lang="en-US" sz="1400" b="1" dirty="0">
                           <a:solidFill>
-                            <a:srgbClr val="B71C1C"/>
+                            <a:srgbClr val="FFFFFF"/>
                           </a:solidFill>
                           <a:latin typeface="Calibri" pitchFamily="34" charset="0"/>
                           <a:ea typeface="Calibri" pitchFamily="34" charset="-122"/>
@@ -3510,7 +3477,7 @@
                       </a:endParaRPr>
                     </a:p>
                   </a:txBody>
-                  <a:tcPr marL="0" marR="100584" marT="0" marB="0" anchor="ctr">
+                  <a:tcPr marL="100584" marR="100584" marT="0" marB="0" anchor="ctr">
                     <a:lnL w="0" cap="flat" cmpd="sng" algn="ctr">
                       <a:noFill/>
                     </a:lnL>
@@ -3529,6 +3496,9 @@
                       <a:headEnd type="none" w="med" len="med"/>
                       <a:tailEnd type="none" w="med" len="med"/>
                     </a:lnB>
+                    <a:solidFill>
+                      <a:srgbClr val="B71C1C"/>
+                    </a:solidFill>
                   </a:tcPr>
                 </a:tc>
                 <a:tc>
@@ -3557,7 +3527,7 @@
                       </a:endParaRPr>
                     </a:p>
                   </a:txBody>
-                  <a:tcPr marL="0" marR="100584" marT="0" marB="0" anchor="ctr">
+                  <a:tcPr marL="100584" marR="100584" marT="0" marB="0" anchor="ctr">
                     <a:lnL w="0" cap="flat" cmpd="sng" algn="ctr">
                       <a:noFill/>
                     </a:lnL>
@@ -3604,7 +3574,7 @@
                       </a:endParaRPr>
                     </a:p>
                   </a:txBody>
-                  <a:tcPr marL="0" marR="100584" marT="0" marB="0" anchor="ctr">
+                  <a:tcPr marL="100584" marR="100584" marT="0" marB="0" anchor="ctr">
                     <a:lnL w="0" cap="flat" cmpd="sng" algn="ctr">
                       <a:noFill/>
                     </a:lnL>
@@ -3651,7 +3621,7 @@
                       </a:endParaRPr>
                     </a:p>
                   </a:txBody>
-                  <a:tcPr marL="0" marR="100584" marT="0" marB="0" anchor="ctr">
+                  <a:tcPr marL="100584" marR="100584" marT="0" marB="0" anchor="ctr">
                     <a:lnL w="0" cap="flat" cmpd="sng" algn="ctr">
                       <a:noFill/>
                     </a:lnL>
@@ -3726,13 +3696,13 @@
                     <a:bodyPr/>
                     <a:lstStyle/>
                     <a:p>
-                      <a:pPr algn="l" indent="0" marL="0">
+                      <a:pPr algn="ctr" indent="0" marL="0">
                         <a:buNone/>
                       </a:pPr>
                       <a:r>
                         <a:rPr lang="en-US" sz="1400" b="1" dirty="0">
                           <a:solidFill>
-                            <a:srgbClr val="2E7D32"/>
+                            <a:srgbClr val="FFFFFF"/>
                           </a:solidFill>
                           <a:latin typeface="Calibri" pitchFamily="34" charset="0"/>
                           <a:ea typeface="Calibri" pitchFamily="34" charset="-122"/>
@@ -3747,7 +3717,7 @@
                       </a:endParaRPr>
                     </a:p>
                   </a:txBody>
-                  <a:tcPr marL="0" marR="100584" marT="0" marB="0" anchor="ctr">
+                  <a:tcPr marL="100584" marR="100584" marT="0" marB="0" anchor="ctr">
                     <a:lnL w="0" cap="flat" cmpd="sng" algn="ctr">
                       <a:noFill/>
                     </a:lnL>
@@ -3766,6 +3736,9 @@
                       <a:headEnd type="none" w="med" len="med"/>
                       <a:tailEnd type="none" w="med" len="med"/>
                     </a:lnB>
+                    <a:solidFill>
+                      <a:srgbClr val="2E7D32"/>
+                    </a:solidFill>
                   </a:tcPr>
                 </a:tc>
                 <a:tc>
@@ -3794,7 +3767,7 @@
                       </a:endParaRPr>
                     </a:p>
                   </a:txBody>
-                  <a:tcPr marL="0" marR="100584" marT="0" marB="0" anchor="ctr">
+                  <a:tcPr marL="100584" marR="100584" marT="0" marB="0" anchor="ctr">
                     <a:lnL w="0" cap="flat" cmpd="sng" algn="ctr">
                       <a:noFill/>
                     </a:lnL>
@@ -3841,7 +3814,7 @@
                       </a:endParaRPr>
                     </a:p>
                   </a:txBody>
-                  <a:tcPr marL="0" marR="100584" marT="0" marB="0" anchor="ctr">
+                  <a:tcPr marL="100584" marR="100584" marT="0" marB="0" anchor="ctr">
                     <a:lnL w="0" cap="flat" cmpd="sng" algn="ctr">
                       <a:noFill/>
                     </a:lnL>
@@ -3888,7 +3861,7 @@
                       </a:endParaRPr>
                     </a:p>
                   </a:txBody>
-                  <a:tcPr marL="0" marR="100584" marT="0" marB="0" anchor="ctr">
+                  <a:tcPr marL="100584" marR="100584" marT="0" marB="0" anchor="ctr">
                     <a:lnL w="0" cap="flat" cmpd="sng" algn="ctr">
                       <a:noFill/>
                     </a:lnL>
@@ -3963,13 +3936,13 @@
                     <a:bodyPr/>
                     <a:lstStyle/>
                     <a:p>
-                      <a:pPr algn="l" indent="0" marL="0">
+                      <a:pPr algn="ctr" indent="0" marL="0">
                         <a:buNone/>
                       </a:pPr>
                       <a:r>
                         <a:rPr lang="en-US" sz="1400" b="1" dirty="0">
                           <a:solidFill>
-                            <a:srgbClr val="B45309"/>
+                            <a:srgbClr val="FFFFFF"/>
                           </a:solidFill>
                           <a:latin typeface="Calibri" pitchFamily="34" charset="0"/>
                           <a:ea typeface="Calibri" pitchFamily="34" charset="-122"/>
@@ -3984,7 +3957,7 @@
                       </a:endParaRPr>
                     </a:p>
                   </a:txBody>
-                  <a:tcPr marL="0" marR="100584" marT="0" marB="0" anchor="ctr">
+                  <a:tcPr marL="100584" marR="100584" marT="0" marB="0" anchor="ctr">
                     <a:lnL w="0" cap="flat" cmpd="sng" algn="ctr">
                       <a:noFill/>
                     </a:lnL>
@@ -4003,6 +3976,9 @@
                       <a:headEnd type="none" w="med" len="med"/>
                       <a:tailEnd type="none" w="med" len="med"/>
                     </a:lnB>
+                    <a:solidFill>
+                      <a:srgbClr val="B45309"/>
+                    </a:solidFill>
                   </a:tcPr>
                 </a:tc>
                 <a:tc>
@@ -4031,7 +4007,7 @@
                       </a:endParaRPr>
                     </a:p>
                   </a:txBody>
-                  <a:tcPr marL="0" marR="100584" marT="0" marB="0" anchor="ctr">
+                  <a:tcPr marL="100584" marR="100584" marT="0" marB="0" anchor="ctr">
                     <a:lnL w="0" cap="flat" cmpd="sng" algn="ctr">
                       <a:noFill/>
                     </a:lnL>
@@ -4078,7 +4054,7 @@
                       </a:endParaRPr>
                     </a:p>
                   </a:txBody>
-                  <a:tcPr marL="0" marR="100584" marT="0" marB="0" anchor="ctr">
+                  <a:tcPr marL="100584" marR="100584" marT="0" marB="0" anchor="ctr">
                     <a:lnL w="0" cap="flat" cmpd="sng" algn="ctr">
                       <a:noFill/>
                     </a:lnL>
@@ -4125,7 +4101,7 @@
                       </a:endParaRPr>
                     </a:p>
                   </a:txBody>
-                  <a:tcPr marL="0" marR="100584" marT="0" marB="0" anchor="ctr">
+                  <a:tcPr marL="100584" marR="100584" marT="0" marB="0" anchor="ctr">
                     <a:lnL w="0" cap="flat" cmpd="sng" algn="ctr">
                       <a:noFill/>
                     </a:lnL>
@@ -4200,13 +4176,13 @@
                     <a:bodyPr/>
                     <a:lstStyle/>
                     <a:p>
-                      <a:pPr algn="l" indent="0" marL="0">
+                      <a:pPr algn="ctr" indent="0" marL="0">
                         <a:buNone/>
                       </a:pPr>
                       <a:r>
                         <a:rPr lang="en-US" sz="1400" b="1" dirty="0">
                           <a:solidFill>
-                            <a:srgbClr val="2E7D32"/>
+                            <a:srgbClr val="FFFFFF"/>
                           </a:solidFill>
                           <a:latin typeface="Calibri" pitchFamily="34" charset="0"/>
                           <a:ea typeface="Calibri" pitchFamily="34" charset="-122"/>
@@ -4221,7 +4197,7 @@
                       </a:endParaRPr>
                     </a:p>
                   </a:txBody>
-                  <a:tcPr marL="0" marR="100584" marT="0" marB="0" anchor="ctr">
+                  <a:tcPr marL="100584" marR="100584" marT="0" marB="0" anchor="ctr">
                     <a:lnL w="0" cap="flat" cmpd="sng" algn="ctr">
                       <a:noFill/>
                     </a:lnL>
@@ -4240,6 +4216,9 @@
                       <a:headEnd type="none" w="med" len="med"/>
                       <a:tailEnd type="none" w="med" len="med"/>
                     </a:lnB>
+                    <a:solidFill>
+                      <a:srgbClr val="2E7D32"/>
+                    </a:solidFill>
                   </a:tcPr>
                 </a:tc>
                 <a:tc>
@@ -4268,7 +4247,7 @@
                       </a:endParaRPr>
                     </a:p>
                   </a:txBody>
-                  <a:tcPr marL="0" marR="100584" marT="0" marB="0" anchor="ctr">
+                  <a:tcPr marL="100584" marR="100584" marT="0" marB="0" anchor="ctr">
                     <a:lnL w="0" cap="flat" cmpd="sng" algn="ctr">
                       <a:noFill/>
                     </a:lnL>
@@ -4315,7 +4294,7 @@
                       </a:endParaRPr>
                     </a:p>
                   </a:txBody>
-                  <a:tcPr marL="0" marR="100584" marT="0" marB="0" anchor="ctr">
+                  <a:tcPr marL="100584" marR="100584" marT="0" marB="0" anchor="ctr">
                     <a:lnL w="0" cap="flat" cmpd="sng" algn="ctr">
                       <a:noFill/>
                     </a:lnL>
@@ -4362,7 +4341,7 @@
                       </a:endParaRPr>
                     </a:p>
                   </a:txBody>
-                  <a:tcPr marL="0" marR="100584" marT="0" marB="0" anchor="ctr">
+                  <a:tcPr marL="100584" marR="100584" marT="0" marB="0" anchor="ctr">
                     <a:lnL w="0" cap="flat" cmpd="sng" algn="ctr">
                       <a:noFill/>
                     </a:lnL>
@@ -4437,13 +4416,13 @@
                     <a:bodyPr/>
                     <a:lstStyle/>
                     <a:p>
-                      <a:pPr algn="l" indent="0" marL="0">
+                      <a:pPr algn="ctr" indent="0" marL="0">
                         <a:buNone/>
                       </a:pPr>
                       <a:r>
                         <a:rPr lang="en-US" sz="1400" b="1" dirty="0">
                           <a:solidFill>
-                            <a:srgbClr val="B45309"/>
+                            <a:srgbClr val="FFFFFF"/>
                           </a:solidFill>
                           <a:latin typeface="Calibri" pitchFamily="34" charset="0"/>
                           <a:ea typeface="Calibri" pitchFamily="34" charset="-122"/>
@@ -4458,7 +4437,7 @@
                       </a:endParaRPr>
                     </a:p>
                   </a:txBody>
-                  <a:tcPr marL="0" marR="100584" marT="0" marB="0" anchor="ctr">
+                  <a:tcPr marL="100584" marR="100584" marT="0" marB="0" anchor="ctr">
                     <a:lnL w="0" cap="flat" cmpd="sng" algn="ctr">
                       <a:noFill/>
                     </a:lnL>
@@ -4477,6 +4456,9 @@
                       <a:headEnd type="none" w="med" len="med"/>
                       <a:tailEnd type="none" w="med" len="med"/>
                     </a:lnB>
+                    <a:solidFill>
+                      <a:srgbClr val="B45309"/>
+                    </a:solidFill>
                   </a:tcPr>
                 </a:tc>
                 <a:tc>
@@ -4505,7 +4487,7 @@
                       </a:endParaRPr>
                     </a:p>
                   </a:txBody>
-                  <a:tcPr marL="0" marR="100584" marT="0" marB="0" anchor="ctr">
+                  <a:tcPr marL="100584" marR="100584" marT="0" marB="0" anchor="ctr">
                     <a:lnL w="0" cap="flat" cmpd="sng" algn="ctr">
                       <a:noFill/>
                     </a:lnL>
@@ -4552,7 +4534,7 @@
                       </a:endParaRPr>
                     </a:p>
                   </a:txBody>
-                  <a:tcPr marL="0" marR="100584" marT="0" marB="0" anchor="ctr">
+                  <a:tcPr marL="100584" marR="100584" marT="0" marB="0" anchor="ctr">
                     <a:lnL w="0" cap="flat" cmpd="sng" algn="ctr">
                       <a:noFill/>
                     </a:lnL>
@@ -4599,7 +4581,7 @@
                       </a:endParaRPr>
                     </a:p>
                   </a:txBody>
-                  <a:tcPr marL="0" marR="100584" marT="0" marB="0" anchor="ctr">
+                  <a:tcPr marL="100584" marR="100584" marT="0" marB="0" anchor="ctr">
                     <a:lnL w="0" cap="flat" cmpd="sng" algn="ctr">
                       <a:noFill/>
                     </a:lnL>
@@ -4787,7 +4769,48 @@
         <p:spPr>
           <a:xfrm>
             <a:off x="609600" y="1524000"/>
-            <a:ext cx="3657600" cy="1117600"/>
+            <a:ext cx="3759200" cy="711200"/>
+          </a:xfrm>
+          <a:prstGeom prst="rect">
+            <a:avLst/>
+          </a:prstGeom>
+          <a:solidFill>
+            <a:srgbClr val="B71C1C"/>
+          </a:solidFill>
+          <a:ln/>
+        </p:spPr>
+        <p:txBody>
+          <a:bodyPr wrap="square" lIns="203200" tIns="0" rIns="203200" bIns="0" rtlCol="0" anchor="ctr"/>
+          <a:lstStyle/>
+          <a:p>
+            <a:pPr algn="l" indent="0" marL="0">
+              <a:buNone/>
+            </a:pPr>
+            <a:r>
+              <a:rPr lang="en-US" sz="2800" b="1" dirty="0">
+                <a:solidFill>
+                  <a:srgbClr val="FFFFFF"/>
+                </a:solidFill>
+                <a:latin typeface="Calibri" pitchFamily="34" charset="0"/>
+                <a:ea typeface="Calibri" pitchFamily="34" charset="-122"/>
+                <a:cs typeface="Calibri" pitchFamily="34" charset="-120"/>
+              </a:rPr>
+              <a:t>Status: Rot</a:t>
+            </a:r>
+            <a:endParaRPr lang="en-US" sz="2800" dirty="0"/>
+          </a:p>
+        </p:txBody>
+      </p:sp>
+      <p:sp>
+        <p:nvSpPr>
+          <p:cNvPr id="4" name="Text 2"/>
+          <p:cNvSpPr txBox="1"/>
+          <p:nvPr/>
+        </p:nvSpPr>
+        <p:spPr>
+          <a:xfrm>
+            <a:off x="609600" y="2438400"/>
+            <a:ext cx="3759200" cy="812800"/>
           </a:xfrm>
           <a:prstGeom prst="rect">
             <a:avLst/>
@@ -4798,43 +4821,6 @@
         <p:txBody>
           <a:bodyPr wrap="square" lIns="0" tIns="0" rIns="0" bIns="0" rtlCol="0" anchor="t"/>
           <a:lstStyle/>
-          <a:p>
-            <a:pPr algn="l" indent="0" marL="0">
-              <a:spcAft>
-                <a:spcPts val="400"/>
-              </a:spcAft>
-              <a:buNone/>
-            </a:pPr>
-            <a:r>
-              <a:rPr lang="en-US" sz="1800" dirty="0">
-                <a:solidFill>
-                  <a:srgbClr val="1B2733"/>
-                </a:solidFill>
-                <a:latin typeface="Calibri" pitchFamily="34" charset="0"/>
-                <a:ea typeface="Calibri" pitchFamily="34" charset="-122"/>
-                <a:cs typeface="Calibri" pitchFamily="34" charset="-120"/>
-              </a:rPr>
-              <a:t>Status: </a:t>
-            </a:r>
-            <a:pPr algn="l" indent="0" marL="0">
-              <a:spcAft>
-                <a:spcPts val="400"/>
-              </a:spcAft>
-              <a:buNone/>
-            </a:pPr>
-            <a:r>
-              <a:rPr lang="en-US" sz="1800" b="1" dirty="0">
-                <a:solidFill>
-                  <a:srgbClr val="B71C1C"/>
-                </a:solidFill>
-                <a:latin typeface="Calibri" pitchFamily="34" charset="0"/>
-                <a:ea typeface="Calibri" pitchFamily="34" charset="-122"/>
-                <a:cs typeface="Calibri" pitchFamily="34" charset="-120"/>
-              </a:rPr>
-              <a:t>Rot</a:t>
-            </a:r>
-            <a:endParaRPr lang="en-US" sz="1800" dirty="0"/>
-          </a:p>
           <a:p>
             <a:pPr algn="l" indent="0" marL="0">
               <a:spcAft>
@@ -4879,14 +4865,14 @@
       </p:sp>
       <p:sp>
         <p:nvSpPr>
-          <p:cNvPr id="4" name="Text 2"/>
+          <p:cNvPr id="5" name="Text 3"/>
           <p:cNvSpPr txBox="1"/>
           <p:nvPr/>
         </p:nvSpPr>
         <p:spPr>
           <a:xfrm>
-            <a:off x="609600" y="3048000"/>
-            <a:ext cx="3657600" cy="1016000"/>
+            <a:off x="609600" y="3556000"/>
+            <a:ext cx="3759200" cy="914400"/>
           </a:xfrm>
           <a:prstGeom prst="rect">
             <a:avLst/>
@@ -4935,13 +4921,13 @@
       </p:sp>
       <p:graphicFrame>
         <p:nvGraphicFramePr>
-          <p:cNvPr id="5" name="Chart 0" descr="Fortschritt der Zulassung in Prozent, KW 35 bis 39. Plan steigt von 55 auf 86, Ist von 52 auf 66."/>
+          <p:cNvPr id="6" name="Chart 0" descr="Fortschritt der Zulassung in Prozent, KW 35 bis 39. Plan steigt von 55 auf 86, Ist von 52 auf 66."/>
           <p:cNvGraphicFramePr/>
           <p:nvPr/>
         </p:nvGraphicFramePr>
         <p:xfrm>
           <a:off x="4876800" y="1524000"/>
-          <a:ext cx="6705600" cy="2946400"/>
+          <a:ext cx="6705600" cy="3048000"/>
         </p:xfrm>
         <a:graphic xmlns:a="http://schemas.openxmlformats.org/drawingml/2006/main">
           <a:graphicData uri="http://schemas.openxmlformats.org/drawingml/2006/chart">
@@ -4951,7 +4937,7 @@
       </p:graphicFrame>
       <p:sp>
         <p:nvSpPr>
-          <p:cNvPr id="6" name="Text 3"/>
+          <p:cNvPr id="7" name="Text 4"/>
           <p:cNvSpPr txBox="1"/>
           <p:nvPr/>
         </p:nvSpPr>
@@ -5111,7 +5097,48 @@
         <p:spPr>
           <a:xfrm>
             <a:off x="609600" y="1524000"/>
-            <a:ext cx="3657600" cy="1117600"/>
+            <a:ext cx="3759200" cy="711200"/>
+          </a:xfrm>
+          <a:prstGeom prst="rect">
+            <a:avLst/>
+          </a:prstGeom>
+          <a:solidFill>
+            <a:srgbClr val="2E7D32"/>
+          </a:solidFill>
+          <a:ln/>
+        </p:spPr>
+        <p:txBody>
+          <a:bodyPr wrap="square" lIns="203200" tIns="0" rIns="203200" bIns="0" rtlCol="0" anchor="ctr"/>
+          <a:lstStyle/>
+          <a:p>
+            <a:pPr algn="l" indent="0" marL="0">
+              <a:buNone/>
+            </a:pPr>
+            <a:r>
+              <a:rPr lang="en-US" sz="2800" b="1" dirty="0">
+                <a:solidFill>
+                  <a:srgbClr val="FFFFFF"/>
+                </a:solidFill>
+                <a:latin typeface="Calibri" pitchFamily="34" charset="0"/>
+                <a:ea typeface="Calibri" pitchFamily="34" charset="-122"/>
+                <a:cs typeface="Calibri" pitchFamily="34" charset="-120"/>
+              </a:rPr>
+              <a:t>Status: Grün</a:t>
+            </a:r>
+            <a:endParaRPr lang="en-US" sz="2800" dirty="0"/>
+          </a:p>
+        </p:txBody>
+      </p:sp>
+      <p:sp>
+        <p:nvSpPr>
+          <p:cNvPr id="4" name="Text 2"/>
+          <p:cNvSpPr txBox="1"/>
+          <p:nvPr/>
+        </p:nvSpPr>
+        <p:spPr>
+          <a:xfrm>
+            <a:off x="609600" y="2438400"/>
+            <a:ext cx="3759200" cy="812800"/>
           </a:xfrm>
           <a:prstGeom prst="rect">
             <a:avLst/>
@@ -5122,43 +5149,6 @@
         <p:txBody>
           <a:bodyPr wrap="square" lIns="0" tIns="0" rIns="0" bIns="0" rtlCol="0" anchor="t"/>
           <a:lstStyle/>
-          <a:p>
-            <a:pPr algn="l" indent="0" marL="0">
-              <a:spcAft>
-                <a:spcPts val="400"/>
-              </a:spcAft>
-              <a:buNone/>
-            </a:pPr>
-            <a:r>
-              <a:rPr lang="en-US" sz="1800" dirty="0">
-                <a:solidFill>
-                  <a:srgbClr val="1B2733"/>
-                </a:solidFill>
-                <a:latin typeface="Calibri" pitchFamily="34" charset="0"/>
-                <a:ea typeface="Calibri" pitchFamily="34" charset="-122"/>
-                <a:cs typeface="Calibri" pitchFamily="34" charset="-120"/>
-              </a:rPr>
-              <a:t>Status: </a:t>
-            </a:r>
-            <a:pPr algn="l" indent="0" marL="0">
-              <a:spcAft>
-                <a:spcPts val="400"/>
-              </a:spcAft>
-              <a:buNone/>
-            </a:pPr>
-            <a:r>
-              <a:rPr lang="en-US" sz="1800" b="1" dirty="0">
-                <a:solidFill>
-                  <a:srgbClr val="2E7D32"/>
-                </a:solidFill>
-                <a:latin typeface="Calibri" pitchFamily="34" charset="0"/>
-                <a:ea typeface="Calibri" pitchFamily="34" charset="-122"/>
-                <a:cs typeface="Calibri" pitchFamily="34" charset="-120"/>
-              </a:rPr>
-              <a:t>Grün</a:t>
-            </a:r>
-            <a:endParaRPr lang="en-US" sz="1800" dirty="0"/>
-          </a:p>
           <a:p>
             <a:pPr algn="l" indent="0" marL="0">
               <a:spcAft>
@@ -5203,14 +5193,14 @@
       </p:sp>
       <p:sp>
         <p:nvSpPr>
-          <p:cNvPr id="4" name="Text 2"/>
+          <p:cNvPr id="5" name="Text 3"/>
           <p:cNvSpPr txBox="1"/>
           <p:nvPr/>
         </p:nvSpPr>
         <p:spPr>
           <a:xfrm>
-            <a:off x="609600" y="3048000"/>
-            <a:ext cx="3657600" cy="1016000"/>
+            <a:off x="609600" y="3556000"/>
+            <a:ext cx="3759200" cy="914400"/>
           </a:xfrm>
           <a:prstGeom prst="rect">
             <a:avLst/>
@@ -5259,13 +5249,13 @@
       </p:sp>
       <p:graphicFrame>
         <p:nvGraphicFramePr>
-          <p:cNvPr id="5" name="Chart 0" descr="Fortschritt des Prototyps in Prozent, KW 35 bis 39. Plan und Ist liegen übereinander bei 72 Prozent in KW 39."/>
+          <p:cNvPr id="6" name="Chart 0" descr="Fortschritt des Prototyps in Prozent, KW 35 bis 39. Plan und Ist liegen übereinander bei 72 Prozent in KW 39."/>
           <p:cNvGraphicFramePr/>
           <p:nvPr/>
         </p:nvGraphicFramePr>
         <p:xfrm>
           <a:off x="4876800" y="1524000"/>
-          <a:ext cx="6705600" cy="2946400"/>
+          <a:ext cx="6705600" cy="3048000"/>
         </p:xfrm>
         <a:graphic xmlns:a="http://schemas.openxmlformats.org/drawingml/2006/main">
           <a:graphicData uri="http://schemas.openxmlformats.org/drawingml/2006/chart">
@@ -5275,7 +5265,7 @@
       </p:graphicFrame>
       <p:sp>
         <p:nvSpPr>
-          <p:cNvPr id="6" name="Text 3"/>
+          <p:cNvPr id="7" name="Text 4"/>
           <p:cNvSpPr txBox="1"/>
           <p:nvPr/>
         </p:nvSpPr>
@@ -5435,7 +5425,48 @@
         <p:spPr>
           <a:xfrm>
             <a:off x="609600" y="1524000"/>
-            <a:ext cx="3657600" cy="1117600"/>
+            <a:ext cx="3759200" cy="711200"/>
+          </a:xfrm>
+          <a:prstGeom prst="rect">
+            <a:avLst/>
+          </a:prstGeom>
+          <a:solidFill>
+            <a:srgbClr val="2E7D32"/>
+          </a:solidFill>
+          <a:ln/>
+        </p:spPr>
+        <p:txBody>
+          <a:bodyPr wrap="square" lIns="203200" tIns="0" rIns="203200" bIns="0" rtlCol="0" anchor="ctr"/>
+          <a:lstStyle/>
+          <a:p>
+            <a:pPr algn="l" indent="0" marL="0">
+              <a:buNone/>
+            </a:pPr>
+            <a:r>
+              <a:rPr lang="en-US" sz="2800" b="1" dirty="0">
+                <a:solidFill>
+                  <a:srgbClr val="FFFFFF"/>
+                </a:solidFill>
+                <a:latin typeface="Calibri" pitchFamily="34" charset="0"/>
+                <a:ea typeface="Calibri" pitchFamily="34" charset="-122"/>
+                <a:cs typeface="Calibri" pitchFamily="34" charset="-120"/>
+              </a:rPr>
+              <a:t>Status: Grün</a:t>
+            </a:r>
+            <a:endParaRPr lang="en-US" sz="2800" dirty="0"/>
+          </a:p>
+        </p:txBody>
+      </p:sp>
+      <p:sp>
+        <p:nvSpPr>
+          <p:cNvPr id="4" name="Text 2"/>
+          <p:cNvSpPr txBox="1"/>
+          <p:nvPr/>
+        </p:nvSpPr>
+        <p:spPr>
+          <a:xfrm>
+            <a:off x="609600" y="2438400"/>
+            <a:ext cx="3759200" cy="812800"/>
           </a:xfrm>
           <a:prstGeom prst="rect">
             <a:avLst/>
@@ -5446,43 +5477,6 @@
         <p:txBody>
           <a:bodyPr wrap="square" lIns="0" tIns="0" rIns="0" bIns="0" rtlCol="0" anchor="t"/>
           <a:lstStyle/>
-          <a:p>
-            <a:pPr algn="l" indent="0" marL="0">
-              <a:spcAft>
-                <a:spcPts val="400"/>
-              </a:spcAft>
-              <a:buNone/>
-            </a:pPr>
-            <a:r>
-              <a:rPr lang="en-US" sz="1800" dirty="0">
-                <a:solidFill>
-                  <a:srgbClr val="1B2733"/>
-                </a:solidFill>
-                <a:latin typeface="Calibri" pitchFamily="34" charset="0"/>
-                <a:ea typeface="Calibri" pitchFamily="34" charset="-122"/>
-                <a:cs typeface="Calibri" pitchFamily="34" charset="-120"/>
-              </a:rPr>
-              <a:t>Status: </a:t>
-            </a:r>
-            <a:pPr algn="l" indent="0" marL="0">
-              <a:spcAft>
-                <a:spcPts val="400"/>
-              </a:spcAft>
-              <a:buNone/>
-            </a:pPr>
-            <a:r>
-              <a:rPr lang="en-US" sz="1800" b="1" dirty="0">
-                <a:solidFill>
-                  <a:srgbClr val="2E7D32"/>
-                </a:solidFill>
-                <a:latin typeface="Calibri" pitchFamily="34" charset="0"/>
-                <a:ea typeface="Calibri" pitchFamily="34" charset="-122"/>
-                <a:cs typeface="Calibri" pitchFamily="34" charset="-120"/>
-              </a:rPr>
-              <a:t>Grün</a:t>
-            </a:r>
-            <a:endParaRPr lang="en-US" sz="1800" dirty="0"/>
-          </a:p>
           <a:p>
             <a:pPr algn="l" indent="0" marL="0">
               <a:spcAft>
@@ -5527,14 +5521,14 @@
       </p:sp>
       <p:sp>
         <p:nvSpPr>
-          <p:cNvPr id="4" name="Text 2"/>
+          <p:cNvPr id="5" name="Text 3"/>
           <p:cNvSpPr txBox="1"/>
           <p:nvPr/>
         </p:nvSpPr>
         <p:spPr>
           <a:xfrm>
-            <a:off x="609600" y="3048000"/>
-            <a:ext cx="3657600" cy="1016000"/>
+            <a:off x="609600" y="3556000"/>
+            <a:ext cx="3759200" cy="914400"/>
           </a:xfrm>
           <a:prstGeom prst="rect">
             <a:avLst/>
@@ -5583,13 +5577,13 @@
       </p:sp>
       <p:graphicFrame>
         <p:nvGraphicFramePr>
-          <p:cNvPr id="5" name="Chart 0" descr="Kumulierte Kosten in Mio. Euro, KW 35 bis 39. Plan 9,2, Ist 8,8 in KW 39."/>
+          <p:cNvPr id="6" name="Chart 0" descr="Kumulierte Kosten in Mio. Euro, KW 35 bis 39. Plan 9,2, Ist 8,8 in KW 39."/>
           <p:cNvGraphicFramePr/>
           <p:nvPr/>
         </p:nvGraphicFramePr>
         <p:xfrm>
           <a:off x="4876800" y="1524000"/>
-          <a:ext cx="6705600" cy="2946400"/>
+          <a:ext cx="6705600" cy="3048000"/>
         </p:xfrm>
         <a:graphic xmlns:a="http://schemas.openxmlformats.org/drawingml/2006/main">
           <a:graphicData uri="http://schemas.openxmlformats.org/drawingml/2006/chart">
@@ -5599,7 +5593,7 @@
       </p:graphicFrame>
       <p:sp>
         <p:nvSpPr>
-          <p:cNvPr id="6" name="Text 3"/>
+          <p:cNvPr id="7" name="Text 4"/>
           <p:cNvSpPr txBox="1"/>
           <p:nvPr/>
         </p:nvSpPr>
